--- a/catalog/editorial/templates/ed_comparison_swapped_2.pptx
+++ b/catalog/editorial/templates/ed_comparison_swapped_2.pptx
@@ -3577,7 +3577,7 @@
           <a:noFill/>
         </p:spPr>
         <p:txBody>
-          <a:bodyPr wrap="square" lIns="18288" rIns="18288" tIns="13716" bIns="13716">
+          <a:bodyPr wrap="square" anchor="t" lIns="18288" rIns="18288" tIns="13716" bIns="13716">
             <a:noAutofit/>
           </a:bodyPr>
           <a:lstStyle/>
@@ -3632,7 +3632,7 @@
           <a:noFill/>
         </p:spPr>
         <p:txBody>
-          <a:bodyPr wrap="square" lIns="18288" rIns="18288" tIns="13716" bIns="13716">
+          <a:bodyPr wrap="square" anchor="t" lIns="18288" rIns="18288" tIns="13716" bIns="13716">
             <a:noAutofit/>
           </a:bodyPr>
           <a:lstStyle/>
@@ -3687,7 +3687,7 @@
           <a:noFill/>
         </p:spPr>
         <p:txBody>
-          <a:bodyPr wrap="square" lIns="18288" rIns="18288" tIns="13716" bIns="13716">
+          <a:bodyPr wrap="square" anchor="t" lIns="18288" rIns="18288" tIns="13716" bIns="13716">
             <a:noAutofit/>
           </a:bodyPr>
           <a:lstStyle/>
@@ -3786,7 +3786,7 @@
           <a:noFill/>
         </p:spPr>
         <p:txBody>
-          <a:bodyPr wrap="square" lIns="18288" rIns="18288" tIns="13716" bIns="13716">
+          <a:bodyPr wrap="square" anchor="t" lIns="18288" rIns="18288" tIns="13716" bIns="13716">
             <a:noAutofit/>
           </a:bodyPr>
           <a:lstStyle/>
@@ -3841,7 +3841,7 @@
           <a:noFill/>
         </p:spPr>
         <p:txBody>
-          <a:bodyPr wrap="square" lIns="18288" rIns="18288" tIns="13716" bIns="13716">
+          <a:bodyPr wrap="square" anchor="t" lIns="18288" rIns="18288" tIns="13716" bIns="13716">
             <a:noAutofit/>
           </a:bodyPr>
           <a:lstStyle/>
@@ -3942,7 +3942,7 @@
           <a:noFill/>
         </p:spPr>
         <p:txBody>
-          <a:bodyPr wrap="square" lIns="18288" rIns="18288" tIns="13716" bIns="13716">
+          <a:bodyPr wrap="square" anchor="t" lIns="18288" rIns="18288" tIns="13716" bIns="13716">
             <a:noAutofit/>
           </a:bodyPr>
           <a:lstStyle/>
@@ -3997,7 +3997,7 @@
           <a:noFill/>
         </p:spPr>
         <p:txBody>
-          <a:bodyPr wrap="square" lIns="18288" rIns="18288" tIns="13716" bIns="13716">
+          <a:bodyPr wrap="square" anchor="t" lIns="18288" rIns="18288" tIns="13716" bIns="13716">
             <a:noAutofit/>
           </a:bodyPr>
           <a:lstStyle/>
@@ -4052,7 +4052,7 @@
           <a:noFill/>
         </p:spPr>
         <p:txBody>
-          <a:bodyPr wrap="square" lIns="18288" rIns="18288" tIns="13716" bIns="13716">
+          <a:bodyPr wrap="square" anchor="t" lIns="18288" rIns="18288" tIns="13716" bIns="13716">
             <a:noAutofit/>
           </a:bodyPr>
           <a:lstStyle/>
@@ -4107,7 +4107,7 @@
           <a:noFill/>
         </p:spPr>
         <p:txBody>
-          <a:bodyPr wrap="square" lIns="18288" rIns="18288" tIns="13716" bIns="13716">
+          <a:bodyPr wrap="square" anchor="t" lIns="18288" rIns="18288" tIns="13716" bIns="13716">
             <a:noAutofit/>
           </a:bodyPr>
           <a:lstStyle/>
@@ -4162,7 +4162,7 @@
           <a:noFill/>
         </p:spPr>
         <p:txBody>
-          <a:bodyPr wrap="square" lIns="18288" rIns="18288" tIns="13716" bIns="13716">
+          <a:bodyPr wrap="square" anchor="t" lIns="18288" rIns="18288" tIns="13716" bIns="13716">
             <a:noAutofit/>
           </a:bodyPr>
           <a:lstStyle/>
@@ -4263,7 +4263,7 @@
           <a:noFill/>
         </p:spPr>
         <p:txBody>
-          <a:bodyPr wrap="square" lIns="18288" rIns="18288" tIns="13716" bIns="13716">
+          <a:bodyPr wrap="square" anchor="t" lIns="18288" rIns="18288" tIns="13716" bIns="13716">
             <a:noAutofit/>
           </a:bodyPr>
           <a:lstStyle/>
@@ -4318,7 +4318,7 @@
           <a:noFill/>
         </p:spPr>
         <p:txBody>
-          <a:bodyPr wrap="square" lIns="18288" rIns="18288" tIns="13716" bIns="13716">
+          <a:bodyPr wrap="square" anchor="t" lIns="18288" rIns="18288" tIns="13716" bIns="13716">
             <a:noAutofit/>
           </a:bodyPr>
           <a:lstStyle/>
@@ -4373,7 +4373,7 @@
           <a:noFill/>
         </p:spPr>
         <p:txBody>
-          <a:bodyPr wrap="square" lIns="18288" rIns="18288" tIns="13716" bIns="13716">
+          <a:bodyPr wrap="square" anchor="t" lIns="18288" rIns="18288" tIns="13716" bIns="13716">
             <a:noAutofit/>
           </a:bodyPr>
           <a:lstStyle/>
@@ -4428,7 +4428,7 @@
           <a:noFill/>
         </p:spPr>
         <p:txBody>
-          <a:bodyPr wrap="square" lIns="18288" rIns="18288" tIns="13716" bIns="13716">
+          <a:bodyPr wrap="square" anchor="t" lIns="18288" rIns="18288" tIns="13716" bIns="13716">
             <a:noAutofit/>
           </a:bodyPr>
           <a:lstStyle/>
@@ -4483,7 +4483,7 @@
           <a:noFill/>
         </p:spPr>
         <p:txBody>
-          <a:bodyPr wrap="square" lIns="18288" rIns="18288" tIns="13716" bIns="13716">
+          <a:bodyPr wrap="square" anchor="t" lIns="18288" rIns="18288" tIns="13716" bIns="13716">
             <a:noAutofit/>
           </a:bodyPr>
           <a:lstStyle/>
